--- a/talks/talk2-fhir-fakes/DD26_CT_260617_Brendan-Kowitz_FhirFakes-dotNET.pptx
+++ b/talks/talk2-fhir-fakes/DD26_CT_260617_Brendan-Kowitz_FhirFakes-dotNET.pptx
@@ -567,7 +567,7 @@
               <a:rPr lang="en-US" b="1" smtClean="0">
                 <a:latin typeface="Open Sans Semibold" panose="020B0606030504020204" pitchFamily="34" charset="0"/>
               </a:rPr>
-              <a:t>6/14/2026</a:t>
+              <a:t>6/15/2026</a:t>
             </a:fld>
             <a:endParaRPr lang="en-US" b="1" dirty="0">
               <a:latin typeface="Open Sans Semibold" panose="020B0606030504020204" pitchFamily="34" charset="0"/>
@@ -745,7 +745,7 @@
             <a:fld id="{E128261A-6A60-FE4F-8563-E0524938461B}" type="datetimeFigureOut">
               <a:rPr lang="en-US" smtClean="0"/>
               <a:pPr/>
-              <a:t>6/14/2026</a:t>
+              <a:t>6/15/2026</a:t>
             </a:fld>
             <a:endParaRPr lang="en-US" dirty="0"/>
           </a:p>
@@ -6095,8 +6095,8 @@
         </p:nvSpPr>
         <p:spPr>
           <a:xfrm>
-            <a:off x="838200" y="1189104"/>
-            <a:ext cx="10515600" cy="768505"/>
+            <a:off x="838200" y="1312333"/>
+            <a:ext cx="10515600" cy="645276"/>
           </a:xfrm>
           <a:prstGeom prst="rect">
             <a:avLst/>
@@ -6104,7 +6104,7 @@
         </p:spPr>
         <p:txBody>
           <a:bodyPr anchor="ctr" anchorCtr="0">
-            <a:normAutofit lnSpcReduction="10000"/>
+            <a:normAutofit fontScale="92500" lnSpcReduction="20000"/>
           </a:bodyPr>
           <a:lstStyle/>
           <a:p>
@@ -13503,13 +13503,7 @@
           <a:p>
             <a:r>
               <a:rPr lang="en-US" dirty="0"/>
-              <a:t>Principal Software Engineering Manager, Microsoft — open-source &amp; hosted FHIR Server for Azure</a:t>
-            </a:r>
-          </a:p>
-          <a:p>
-            <a:r>
-              <a:rPr lang="en-US" dirty="0"/>
-              <a:t>Creator of Ignixa — a .NET-native FHIR ecosystem (server, SQL-on-FHIR, FhirFakes)</a:t>
+              <a:t>Principal Software Engineering Manager, Microsoft - open-source &amp; hosted FHIR Server for Azure</a:t>
             </a:r>
           </a:p>
           <a:p>
@@ -13521,8 +13515,13 @@
           <a:p>
             <a:r>
               <a:rPr lang="en-US" dirty="0"/>
-              <a:t>github.com/brendankowitz/ignixa-fhir</a:t>
-            </a:r>
+              <a:t>github.com/</a:t>
+            </a:r>
+            <a:r>
+              <a:rPr lang="en-US" dirty="0" err="1"/>
+              <a:t>brendankowitz</a:t>
+            </a:r>
+            <a:endParaRPr lang="en-US" dirty="0"/>
           </a:p>
         </p:txBody>
       </p:sp>
@@ -23921,4 +23920,10 @@
   <we:bindings/>
   <we:snapshot xmlns:r="http://schemas.openxmlformats.org/officeDocument/2006/relationships"/>
 </we:webextension>
+</file>
+
+<file path=docMetadata/LabelInfo.xml><?xml version="1.0" encoding="utf-8"?>
+<clbl:labelList xmlns:clbl="http://schemas.microsoft.com/office/2020/mipLabelMetadata">
+  <clbl:label id="{f42aa342-8706-4288-bd11-ebb85995028c}" enabled="1" method="Standard" siteId="{72f988bf-86f1-41af-91ab-2d7cd011db47}" contentBits="0" removed="0"/>
+</clbl:labelList>
 </file>